--- a/companies/ashcombe-advisory/Engagements/Barrera Group/2017.03.23 - Briefing Deck - Barrera Group.pptx
+++ b/companies/ashcombe-advisory/Engagements/Barrera Group/2017.03.23 - Briefing Deck - Barrera Group.pptx
@@ -3114,7 +3114,7 @@
                   <a:srgbClr val="4A2E2A"/>
                 </a:solidFill>
               </a:rPr>
-              <a:t>Corporate Positioning for Barrera Group</a:t>
+              <a:t>Positioning Brief: Barrera Group</a:t>
             </a:r>
           </a:p>
         </p:txBody>
@@ -3141,13 +3141,13 @@
           <a:p>
             <a:pPr lvl="1"/>
             <a:r>
-              <a:t>Client: Barrera Group</a:t>
+              <a:t>Engagement: Corporate Positioning for Barrera Group</a:t>
             </a:r>
           </a:p>
           <a:p>
             <a:pPr lvl="1"/>
             <a:r>
-              <a:t>Engagement kickoff: February 15, 2017</a:t>
+              <a:t>Kickoff: February 15, 2017</a:t>
             </a:r>
           </a:p>
           <a:p>
@@ -3159,13 +3159,13 @@
           <a:p>
             <a:pPr lvl="1"/>
             <a:r>
-              <a:t>With Michelle Rose, Communications Associate</a:t>
+              <a:t>Drafting support: Michelle Rose, Communications Associate</a:t>
             </a:r>
           </a:p>
           <a:p>
             <a:pPr lvl="1"/>
             <a:r>
-              <a:t>Client sponsor: Mary Frank, Director of Operations</a:t>
+              <a:t>Client lead: Mary Frank, Director of Operations</a:t>
             </a:r>
           </a:p>
         </p:txBody>
@@ -3209,7 +3209,7 @@
                   <a:srgbClr val="4A2E2A"/>
                 </a:solidFill>
               </a:rPr>
-              <a:t>Where Barrera Group Stands Today</a:t>
+              <a:t>Where the Story Sits Today</a:t>
             </a:r>
           </a:p>
         </p:txBody>
@@ -3231,31 +3231,31 @@
           <a:p>
             <a:pPr lvl="1"/>
             <a:r>
-              <a:t>A strong operating story that is under-told outside the current investor base.</a:t>
+              <a:t>The operating results are solid, but the outside story trails what the business actually does.</a:t>
             </a:r>
           </a:p>
           <a:p>
             <a:pPr lvl="1"/>
             <a:r>
-              <a:t>Messaging drifts across the website, recent releases, and leadership remarks.</a:t>
+              <a:t>The language reads differently on the website, in recent releases, and in leadership remarks.</a:t>
             </a:r>
           </a:p>
           <a:p>
             <a:pPr lvl="1"/>
             <a:r>
-              <a:t>No single sentence a reporter or analyst would reach for to describe the company.</a:t>
+              <a:t>There is no single sentence an analyst or reporter would reach for to describe the company.</a:t>
             </a:r>
           </a:p>
           <a:p>
             <a:pPr lvl="1"/>
             <a:r>
-              <a:t>Peers have moved faster to claim the category language the company should own.</a:t>
+              <a:t>Two competitors have already claimed category language this business has a stronger right to.</a:t>
             </a:r>
           </a:p>
           <a:p>
             <a:pPr lvl="1"/>
             <a:r>
-              <a:t>The upside is real: the fundamentals support a sharper, more confident story.</a:t>
+              <a:t>The upside is real: the fundamentals support a sharper, more confident story than the one being told.</a:t>
             </a:r>
           </a:p>
         </p:txBody>
@@ -3321,31 +3321,25 @@
           <a:p>
             <a:pPr lvl="1"/>
             <a:r>
-              <a:t>Leadership wants growth framed around discipline, not scale for its own sake.</a:t>
+              <a:t>Leadership wants growth described as disciplined, not scale for its own sake.</a:t>
             </a:r>
           </a:p>
           <a:p>
             <a:pPr lvl="1"/>
             <a:r>
-              <a:t>The board is wary of anything that reads as pre-IPO hype.</a:t>
+              <a:t>The board does not want anything that reads as pre-IPO promotion.</a:t>
             </a:r>
           </a:p>
           <a:p>
             <a:pPr lvl="1"/>
             <a:r>
-              <a:t>Operations sees a gap between how the company runs and how it sounds.</a:t>
+              <a:t>Operations sees daylight between how the company runs and how it currently sounds.</a:t>
             </a:r>
           </a:p>
           <a:p>
             <a:pPr lvl="1"/>
             <a:r>
-              <a:t>Investors respond to proof, so every claim needs a fact standing behind it.</a:t>
-            </a:r>
-          </a:p>
-          <a:p>
-            <a:pPr lvl="1"/>
-            <a:r>
-              <a:t>Broad agreement that the current boilerplate has aged out.</a:t>
+              <a:t>Every external claim needs a fact behind it that your team can stand up on request.</a:t>
             </a:r>
           </a:p>
         </p:txBody>
@@ -3389,7 +3383,7 @@
                   <a:srgbClr val="4A2E2A"/>
                 </a:solidFill>
               </a:rPr>
-              <a:t>Positioning Priorities</a:t>
+              <a:t>The Frame We Are Building</a:t>
             </a:r>
           </a:p>
         </p:txBody>
@@ -3411,31 +3405,31 @@
           <a:p>
             <a:pPr lvl="1"/>
             <a:r>
-              <a:t>Settle a single core positioning statement before anything else moves.</a:t>
+              <a:t>One core positioning statement the whole company can repeat without adjustment.</a:t>
             </a:r>
           </a:p>
           <a:p>
             <a:pPr lvl="1"/>
             <a:r>
-              <a:t>Rebuild the messaging map around audience, claim, and proof.</a:t>
+              <a:t>A messaging map that pairs each audience with a single claim and the proof behind it.</a:t>
             </a:r>
           </a:p>
           <a:p>
             <a:pPr lvl="1"/>
             <a:r>
-              <a:t>Align the executive narrative so leaders tell one consistent story.</a:t>
+              <a:t>An executive narrative so leaders tell the same story in the same order.</a:t>
             </a:r>
           </a:p>
           <a:p>
             <a:pPr lvl="1"/>
             <a:r>
-              <a:t>Retire the language that reads as promotional and replace it with evidence.</a:t>
+              <a:t>A plain-language replacement for the boilerplate that has aged out of use.</a:t>
             </a:r>
           </a:p>
           <a:p>
             <a:pPr lvl="1"/>
             <a:r>
-              <a:t>Order the announcement calendar behind the new frame.</a:t>
+              <a:t>An announcement calendar ordered so each release reinforces the one before it.</a:t>
             </a:r>
           </a:p>
         </p:txBody>
@@ -3479,7 +3473,7 @@
                   <a:srgbClr val="4A2E2A"/>
                 </a:solidFill>
               </a:rPr>
-              <a:t>How We Will Work</a:t>
+              <a:t>How the First Weeks Run</a:t>
             </a:r>
           </a:p>
         </p:txBody>
@@ -3501,25 +3495,31 @@
           <a:p>
             <a:pPr lvl="1"/>
             <a:r>
-              <a:t>Daniel Valenzuela leads the engagement and owns client review.</a:t>
+              <a:t>We gather the current materials and mark every place the language diverges.</a:t>
             </a:r>
           </a:p>
           <a:p>
             <a:pPr lvl="1"/>
             <a:r>
-              <a:t>Michelle Rose drafts the messaging map and routes each version for approval.</a:t>
+              <a:t>Michelle Rose turns the agreed direction into draft copy for your review.</a:t>
             </a:r>
           </a:p>
           <a:p>
             <a:pPr lvl="1"/>
             <a:r>
-              <a:t>Status runs by email each week; decisions are confirmed in writing.</a:t>
+              <a:t>Nothing investor-facing circulates until the internal narrative is settled.</a:t>
             </a:r>
           </a:p>
           <a:p>
             <a:pPr lvl="1"/>
             <a:r>
-              <a:t>Nothing external goes out ahead of Mary Frank and the Barrera Group leadership review.</a:t>
+              <a:t>You see each draft before it moves past the working group.</a:t>
+            </a:r>
+          </a:p>
+          <a:p>
+            <a:pPr lvl="1"/>
+            <a:r>
+              <a:t>We hold one master copy of every document so your team is never reading an old version.</a:t>
             </a:r>
           </a:p>
         </p:txBody>
@@ -3563,7 +3563,7 @@
                   <a:srgbClr val="4A2E2A"/>
                 </a:solidFill>
               </a:rPr>
-              <a:t>Next Steps</a:t>
+              <a:t>Next Step</a:t>
             </a:r>
           </a:p>
         </p:txBody>
@@ -3585,25 +3585,13 @@
           <a:p>
             <a:pPr lvl="1"/>
             <a:r>
-              <a:t>Circulate the draft positioning statement for comment this week.</a:t>
+              <a:t>Working group confirmed: Daniel Valenzuela and Michelle Rose here, Mary Frank leading on your side.</a:t>
             </a:r>
           </a:p>
           <a:p>
             <a:pPr lvl="1"/>
             <a:r>
-              <a:t>Book a working session to pressure-test the messaging map together.</a:t>
-            </a:r>
-          </a:p>
-          <a:p>
-            <a:pPr lvl="1"/>
-            <a:r>
-              <a:t>Collect the outstanding proof points from the Barrera Group team.</a:t>
-            </a:r>
-          </a:p>
-          <a:p>
-            <a:pPr lvl="1"/>
-            <a:r>
-              <a:t>Confirm the near-term announcement we are writing toward.</a:t>
+              <a:t>Send two or three windows this week for a thirty-minute walk-through of the draft messaging map, and I will set it up.</a:t>
             </a:r>
           </a:p>
         </p:txBody>
